--- a/Zemi/回答应对.pptx
+++ b/Zemi/回答应对.pptx
@@ -8,7 +8,8 @@
     <p:notesMasterId r:id="rId4"/>
   </p:notesMasterIdLst>
   <p:sldIdLst>
-    <p:sldId id="359" r:id="rId3"/>
+    <p:sldId id="360" r:id="rId3"/>
+    <p:sldId id="359" r:id="rId5"/>
   </p:sldIdLst>
   <p:sldSz cx="9144000" cy="6858000" type="screen4x3"/>
   <p:notesSz cx="6858000" cy="9144000"/>
@@ -458,6 +459,70 @@
 </file>
 
 <file path=ppt/notesSlides/notesSlide1.xml><?xml version="1.0" encoding="utf-8"?>
+<p:notes xmlns:a="http://schemas.openxmlformats.org/drawingml/2006/main" xmlns:r="http://schemas.openxmlformats.org/officeDocument/2006/relationships" xmlns:p="http://schemas.openxmlformats.org/presentationml/2006/main">
+  <p:cSld>
+    <p:spTree>
+      <p:nvGrpSpPr>
+        <p:cNvPr id="1" name=""/>
+        <p:cNvGrpSpPr/>
+        <p:nvPr/>
+      </p:nvGrpSpPr>
+      <p:grpSpPr/>
+      <p:sp>
+        <p:nvSpPr>
+          <p:cNvPr id="2" name="Slide Image Placeholder 1"/>
+          <p:cNvSpPr>
+            <a:spLocks noGrp="1"/>
+          </p:cNvSpPr>
+          <p:nvPr>
+            <p:ph type="sldImg"/>
+          </p:nvPr>
+        </p:nvSpPr>
+        <p:spPr/>
+      </p:sp>
+      <p:sp>
+        <p:nvSpPr>
+          <p:cNvPr id="3" name="Notes Placeholder 2"/>
+          <p:cNvSpPr>
+            <a:spLocks noGrp="1"/>
+          </p:cNvSpPr>
+          <p:nvPr>
+            <p:ph type="body" idx="1"/>
+          </p:nvPr>
+        </p:nvSpPr>
+        <p:spPr/>
+        <p:txBody>
+          <a:bodyPr/>
+          <a:lstStyle/>
+          <a:p/>
+        </p:txBody>
+      </p:sp>
+      <p:sp>
+        <p:nvSpPr>
+          <p:cNvPr id="4" name="Slide Number Placeholder 3"/>
+          <p:cNvSpPr>
+            <a:spLocks noGrp="1"/>
+          </p:cNvSpPr>
+          <p:nvPr>
+            <p:ph type="sldNum" idx="5"/>
+          </p:nvPr>
+        </p:nvSpPr>
+        <p:spPr/>
+        <p:txBody>
+          <a:bodyPr/>
+          <a:lstStyle/>
+          <a:p/>
+        </p:txBody>
+      </p:sp>
+    </p:spTree>
+  </p:cSld>
+  <p:clrMapOvr>
+    <a:masterClrMapping/>
+  </p:clrMapOvr>
+</p:notes>
+</file>
+
+<file path=ppt/notesSlides/notesSlide2.xml><?xml version="1.0" encoding="utf-8"?>
 <p:notes xmlns:a="http://schemas.openxmlformats.org/drawingml/2006/main" xmlns:r="http://schemas.openxmlformats.org/officeDocument/2006/relationships" xmlns:p="http://schemas.openxmlformats.org/presentationml/2006/main">
   <p:cSld>
     <p:spTree>
@@ -3670,6 +3735,122 @@
 </file>
 
 <file path=ppt/slides/slide1.xml><?xml version="1.0" encoding="utf-8"?>
+<p:sld xmlns:a="http://schemas.openxmlformats.org/drawingml/2006/main" xmlns:r="http://schemas.openxmlformats.org/officeDocument/2006/relationships" xmlns:p="http://schemas.openxmlformats.org/presentationml/2006/main">
+  <p:cSld>
+    <p:spTree>
+      <p:nvGrpSpPr>
+        <p:cNvPr id="1" name=""/>
+        <p:cNvGrpSpPr/>
+        <p:nvPr/>
+      </p:nvGrpSpPr>
+      <p:grpSpPr/>
+      <p:sp>
+        <p:nvSpPr>
+          <p:cNvPr id="2" name="文本框 1"/>
+          <p:cNvSpPr txBox="1"/>
+          <p:nvPr/>
+        </p:nvSpPr>
+        <p:spPr>
+          <a:xfrm>
+            <a:off x="356235" y="739140"/>
+            <a:ext cx="8431530" cy="2081530"/>
+          </a:xfrm>
+          <a:prstGeom prst="rect">
+            <a:avLst/>
+          </a:prstGeom>
+        </p:spPr>
+        <p:txBody>
+          <a:bodyPr wrap="square">
+            <a:spAutoFit/>
+          </a:bodyPr>
+          <a:p>
+            <a:pPr indent="0">
+              <a:lnSpc>
+                <a:spcPct val="90000"/>
+              </a:lnSpc>
+              <a:buFont typeface="Arial" panose="020B0604020202020204" pitchFamily="34" charset="0"/>
+              <a:buNone/>
+            </a:pPr>
+            <a:r>
+              <a:rPr lang="en-US" altLang="zh-CN"/>
+              <a:t>Q</a:t>
+            </a:r>
+            <a:r>
+              <a:rPr lang="zh-CN" altLang="en-US">
+                <a:ea typeface="SimSun" panose="02010600030101010101" pitchFamily="2" charset="-122"/>
+              </a:rPr>
+              <a:t>：为什么要使用回归模型，分类模型不行吗</a:t>
+            </a:r>
+            <a:br>
+              <a:rPr lang="zh-CN" altLang="en-US">
+                <a:ea typeface="SimSun" panose="02010600030101010101" pitchFamily="2" charset="-122"/>
+              </a:rPr>
+            </a:br>
+            <a:r>
+              <a:rPr lang="en-US" altLang="zh-CN">
+                <a:ea typeface="SimSun" panose="02010600030101010101" pitchFamily="2" charset="-122"/>
+              </a:rPr>
+              <a:t>A</a:t>
+            </a:r>
+            <a:r>
+              <a:rPr lang="zh-CN" altLang="en-US">
+                <a:ea typeface="SimSun" panose="02010600030101010101" pitchFamily="2" charset="-122"/>
+              </a:rPr>
+              <a:t>：</a:t>
+            </a:r>
+            <a:r>
+              <a:rPr lang="en-US" altLang="zh-CN">
+                <a:ea typeface="SimSun" panose="02010600030101010101" pitchFamily="2" charset="-122"/>
+              </a:rPr>
+              <a:t>Classification models can recognize discrete gestures, such as opening and closing the hand. However, they do not directly provide continuous fingertip aperture information. This may limit the ability to reproduce natural human grasping movements.</a:t>
+            </a:r>
+            <a:br>
+              <a:rPr lang="zh-CN" altLang="en-US">
+                <a:ea typeface="SimSun" panose="02010600030101010101" pitchFamily="2" charset="-122"/>
+              </a:rPr>
+            </a:br>
+            <a:br>
+              <a:rPr lang="zh-CN" altLang="en-US">
+                <a:ea typeface="SimSun" panose="02010600030101010101" pitchFamily="2" charset="-122"/>
+              </a:rPr>
+            </a:br>
+            <a:br>
+              <a:rPr lang="zh-CN" altLang="en-US">
+                <a:ea typeface="SimSun" panose="02010600030101010101" pitchFamily="2" charset="-122"/>
+              </a:rPr>
+            </a:br>
+            <a:endParaRPr lang="en-US" altLang="zh-CN"/>
+          </a:p>
+          <a:p>
+            <a:pPr indent="0">
+              <a:lnSpc>
+                <a:spcPct val="90000"/>
+              </a:lnSpc>
+              <a:buFont typeface="Arial" panose="020B0604020202020204" pitchFamily="34" charset="0"/>
+              <a:buNone/>
+            </a:pPr>
+            <a:endParaRPr lang="zh-CN" altLang="en-US">
+              <a:ea typeface="SimSun" panose="02010600030101010101" pitchFamily="2" charset="-122"/>
+            </a:endParaRPr>
+          </a:p>
+        </p:txBody>
+      </p:sp>
+    </p:spTree>
+  </p:cSld>
+  <p:clrMapOvr>
+    <a:masterClrMapping/>
+  </p:clrMapOvr>
+  <p:timing>
+    <p:tnLst>
+      <p:par>
+        <p:cTn id="1" dur="indefinite" restart="never" nodeType="tmRoot"/>
+      </p:par>
+    </p:tnLst>
+  </p:timing>
+</p:sld>
+</file>
+
+<file path=ppt/slides/slide2.xml><?xml version="1.0" encoding="utf-8"?>
 <p:sld xmlns:a="http://schemas.openxmlformats.org/drawingml/2006/main" xmlns:r="http://schemas.openxmlformats.org/officeDocument/2006/relationships" xmlns:p="http://schemas.openxmlformats.org/presentationml/2006/main">
   <p:cSld>
     <p:spTree>
@@ -4458,26 +4639,6 @@
 </file>
 
 <file path=customXml/item1.xml><?xml version="1.0" encoding="utf-8"?>
-<?mso-contentType ?>
-<FormTemplates xmlns="http://schemas.microsoft.com/sharepoint/v3/contenttype/forms">
-  <Display>DocumentLibraryForm</Display>
-  <Edit>DocumentLibraryForm</Edit>
-  <New>DocumentLibraryForm</New>
-</FormTemplates>
-</file>
-
-<file path=customXml/item2.xml><?xml version="1.0" encoding="utf-8"?>
-<p:properties xmlns:p="http://schemas.microsoft.com/office/2006/metadata/properties" xmlns:xsi="http://www.w3.org/2001/XMLSchema-instance" xmlns:pc="http://schemas.microsoft.com/office/infopath/2007/PartnerControls">
-  <documentManagement>
-    <lcf76f155ced4ddcb4097134ff3c332f xmlns="c8a3c59a-3bb1-4ac4-8580-9b2ba74cfe5b">
-      <Terms xmlns="http://schemas.microsoft.com/office/infopath/2007/PartnerControls"/>
-    </lcf76f155ced4ddcb4097134ff3c332f>
-    <TaxCatchAll xmlns="56bf2a1e-b0f5-401e-a825-4d0cd333482d" xsi:nil="true"/>
-  </documentManagement>
-</p:properties>
-</file>
-
-<file path=customXml/item3.xml><?xml version="1.0" encoding="utf-8"?>
 <ct:contentTypeSchema xmlns:ct="http://schemas.microsoft.com/office/2006/metadata/contentType" xmlns:ma="http://schemas.microsoft.com/office/2006/metadata/properties/metaAttributes" ct:_="" ma:_="" ma:contentTypeName="ドキュメント" ma:contentTypeID="0x010100EEEA4EB4B1C87045B2C7B9E34AE6DFF4" ma:contentTypeVersion="19" ma:contentTypeDescription="新しいドキュメントを作成します。" ma:contentTypeScope="" ma:versionID="195f4af887e8b02337b1b142d1f847de">
   <xsd:schema xmlns:xsd="http://www.w3.org/2001/XMLSchema" xmlns:xs="http://www.w3.org/2001/XMLSchema" xmlns:p="http://schemas.microsoft.com/office/2006/metadata/properties" xmlns:ns2="c8a3c59a-3bb1-4ac4-8580-9b2ba74cfe5b" xmlns:ns3="56bf2a1e-b0f5-401e-a825-4d0cd333482d" targetNamespace="http://schemas.microsoft.com/office/2006/metadata/properties" ma:root="true" ma:fieldsID="81e6449237d2fc142489e0904e1e7166" ns2:_="" ns3:_="">
     <xsd:import namespace="c8a3c59a-3bb1-4ac4-8580-9b2ba74cfe5b"/>
@@ -4738,20 +4899,40 @@
 </ct:contentTypeSchema>
 </file>
 
+<file path=customXml/item2.xml><?xml version="1.0" encoding="utf-8"?>
+<?mso-contentType ?>
+<FormTemplates xmlns="http://schemas.microsoft.com/sharepoint/v3/contenttype/forms">
+  <Display>DocumentLibraryForm</Display>
+  <Edit>DocumentLibraryForm</Edit>
+  <New>DocumentLibraryForm</New>
+</FormTemplates>
+</file>
+
+<file path=customXml/item3.xml><?xml version="1.0" encoding="utf-8"?>
+<p:properties xmlns:p="http://schemas.microsoft.com/office/2006/metadata/properties" xmlns:xsi="http://www.w3.org/2001/XMLSchema-instance" xmlns:pc="http://schemas.microsoft.com/office/infopath/2007/PartnerControls">
+  <documentManagement>
+    <lcf76f155ced4ddcb4097134ff3c332f xmlns="c8a3c59a-3bb1-4ac4-8580-9b2ba74cfe5b">
+      <Terms xmlns="http://schemas.microsoft.com/office/infopath/2007/PartnerControls"/>
+    </lcf76f155ced4ddcb4097134ff3c332f>
+    <TaxCatchAll xmlns="56bf2a1e-b0f5-401e-a825-4d0cd333482d" xsi:nil="true"/>
+  </documentManagement>
+</p:properties>
+</file>
+
 <file path=customXml/itemProps1.xml><?xml version="1.0" encoding="utf-8"?>
+<ds:datastoreItem xmlns:ds="http://schemas.openxmlformats.org/officeDocument/2006/customXml" ds:itemID="{0E5148B6-4531-42C7-8EF9-49C77F467C6E}">
+  <ds:schemaRefs/>
+</ds:datastoreItem>
+</file>
+
+<file path=customXml/itemProps2.xml><?xml version="1.0" encoding="utf-8"?>
 <ds:datastoreItem xmlns:ds="http://schemas.openxmlformats.org/officeDocument/2006/customXml" ds:itemID="{9FF3F963-4824-4617-9390-F81F48A450C9}">
   <ds:schemaRefs/>
 </ds:datastoreItem>
 </file>
 
-<file path=customXml/itemProps2.xml><?xml version="1.0" encoding="utf-8"?>
+<file path=customXml/itemProps3.xml><?xml version="1.0" encoding="utf-8"?>
 <ds:datastoreItem xmlns:ds="http://schemas.openxmlformats.org/officeDocument/2006/customXml" ds:itemID="{D3FA7E84-7FC5-4C41-A4F9-8872414BB2F4}">
   <ds:schemaRefs/>
 </ds:datastoreItem>
-</file>
-
-<file path=customXml/itemProps3.xml><?xml version="1.0" encoding="utf-8"?>
-<ds:datastoreItem xmlns:ds="http://schemas.openxmlformats.org/officeDocument/2006/customXml" ds:itemID="{0E5148B6-4531-42C7-8EF9-49C77F467C6E}">
-  <ds:schemaRefs/>
-</ds:datastoreItem>
 </file>
--- a/Zemi/回答应对.pptx
+++ b/Zemi/回答应对.pptx
@@ -3753,7 +3753,7 @@
         <p:spPr>
           <a:xfrm>
             <a:off x="356235" y="739140"/>
-            <a:ext cx="8431530" cy="2081530"/>
+            <a:ext cx="8431530" cy="2827655"/>
           </a:xfrm>
           <a:prstGeom prst="rect">
             <a:avLst/>
@@ -3803,6 +3803,59 @@
                 <a:ea typeface="SimSun" panose="02010600030101010101" pitchFamily="2" charset="-122"/>
               </a:rPr>
               <a:t>Classification models can recognize discrete gestures, such as opening and closing the hand. However, they do not directly provide continuous fingertip aperture information. This may limit the ability to reproduce natural human grasping movements.</a:t>
+            </a:r>
+            <a:endParaRPr lang="en-US" altLang="zh-CN">
+              <a:ea typeface="SimSun" panose="02010600030101010101" pitchFamily="2" charset="-122"/>
+            </a:endParaRPr>
+          </a:p>
+          <a:p>
+            <a:pPr indent="0">
+              <a:lnSpc>
+                <a:spcPct val="90000"/>
+              </a:lnSpc>
+              <a:buFont typeface="Arial" panose="020B0604020202020204" pitchFamily="34" charset="0"/>
+              <a:buNone/>
+            </a:pPr>
+            <a:endParaRPr lang="en-US" altLang="zh-CN">
+              <a:ea typeface="SimSun" panose="02010600030101010101" pitchFamily="2" charset="-122"/>
+            </a:endParaRPr>
+          </a:p>
+          <a:p>
+            <a:pPr indent="0">
+              <a:lnSpc>
+                <a:spcPct val="90000"/>
+              </a:lnSpc>
+              <a:buFont typeface="Arial" panose="020B0604020202020204" pitchFamily="34" charset="0"/>
+              <a:buNone/>
+            </a:pPr>
+            <a:r>
+              <a:rPr lang="en-US" altLang="zh-CN">
+                <a:ea typeface="SimSun" panose="02010600030101010101" pitchFamily="2" charset="-122"/>
+              </a:rPr>
+              <a:t>Q</a:t>
+            </a:r>
+            <a:r>
+              <a:rPr lang="zh-CN" altLang="en-US">
+                <a:ea typeface="SimSun" panose="02010600030101010101" pitchFamily="2" charset="-122"/>
+              </a:rPr>
+              <a:t>：分类模型也能做到那个动作，为什么要使用回归模型</a:t>
+            </a:r>
+            <a:br>
+              <a:rPr lang="zh-CN" altLang="en-US">
+                <a:ea typeface="SimSun" panose="02010600030101010101" pitchFamily="2" charset="-122"/>
+              </a:rPr>
+            </a:br>
+            <a:r>
+              <a:rPr lang="en-US" altLang="zh-CN">
+                <a:ea typeface="SimSun" panose="02010600030101010101" pitchFamily="2" charset="-122"/>
+              </a:rPr>
+              <a:t>A</a:t>
+            </a:r>
+            <a:r>
+              <a:rPr lang="zh-CN" altLang="en-US">
+                <a:ea typeface="SimSun" panose="02010600030101010101" pitchFamily="2" charset="-122"/>
+              </a:rPr>
+              <a:t>：或许在某个时间点，机械手会处于那个动作。</a:t>
             </a:r>
             <a:br>
               <a:rPr lang="zh-CN" altLang="en-US">
@@ -3869,7 +3922,7 @@
         <p:spPr>
           <a:xfrm>
             <a:off x="356235" y="739140"/>
-            <a:ext cx="8431530" cy="4071620"/>
+            <a:ext cx="8431530" cy="4818380"/>
           </a:xfrm>
           <a:prstGeom prst="rect">
             <a:avLst/>
@@ -4109,6 +4162,78 @@
                 <a:ea typeface="SimSun" panose="02010600030101010101" pitchFamily="2" charset="-122"/>
               </a:rPr>
               <a:t>？不会有什么问题吗？</a:t>
+            </a:r>
+            <a:endParaRPr lang="zh-CN" altLang="en-US">
+              <a:ea typeface="SimSun" panose="02010600030101010101" pitchFamily="2" charset="-122"/>
+            </a:endParaRPr>
+          </a:p>
+          <a:p>
+            <a:pPr indent="0">
+              <a:lnSpc>
+                <a:spcPct val="90000"/>
+              </a:lnSpc>
+              <a:buFont typeface="Arial" panose="020B0604020202020204" pitchFamily="34" charset="0"/>
+              <a:buNone/>
+            </a:pPr>
+            <a:endParaRPr lang="zh-CN" altLang="en-US">
+              <a:ea typeface="SimSun" panose="02010600030101010101" pitchFamily="2" charset="-122"/>
+            </a:endParaRPr>
+          </a:p>
+          <a:p>
+            <a:pPr indent="0">
+              <a:lnSpc>
+                <a:spcPct val="90000"/>
+              </a:lnSpc>
+              <a:buFont typeface="Arial" panose="020B0604020202020204" pitchFamily="34" charset="0"/>
+              <a:buNone/>
+            </a:pPr>
+            <a:r>
+              <a:rPr lang="en-US" altLang="zh-CN">
+                <a:ea typeface="SimSun" panose="02010600030101010101" pitchFamily="2" charset="-122"/>
+              </a:rPr>
+              <a:t>Q</a:t>
+            </a:r>
+            <a:r>
+              <a:rPr lang="zh-CN" altLang="en-US">
+                <a:ea typeface="SimSun" panose="02010600030101010101" pitchFamily="2" charset="-122"/>
+              </a:rPr>
+              <a:t>：</a:t>
+            </a:r>
+            <a:r>
+              <a:rPr lang="en-US" altLang="zh-CN">
+                <a:ea typeface="SimSun" panose="02010600030101010101" pitchFamily="2" charset="-122"/>
+              </a:rPr>
+              <a:t>Nomalized RMSE</a:t>
+            </a:r>
+            <a:r>
+              <a:rPr lang="zh-CN" altLang="en-US">
+                <a:ea typeface="SimSun" panose="02010600030101010101" pitchFamily="2" charset="-122"/>
+              </a:rPr>
+              <a:t>是怎么算的</a:t>
+            </a:r>
+            <a:endParaRPr lang="zh-CN" altLang="en-US">
+              <a:ea typeface="SimSun" panose="02010600030101010101" pitchFamily="2" charset="-122"/>
+            </a:endParaRPr>
+          </a:p>
+          <a:p>
+            <a:pPr indent="0">
+              <a:lnSpc>
+                <a:spcPct val="90000"/>
+              </a:lnSpc>
+              <a:buFont typeface="Arial" panose="020B0604020202020204" pitchFamily="34" charset="0"/>
+              <a:buNone/>
+            </a:pPr>
+            <a:r>
+              <a:rPr lang="en-US" altLang="zh-CN">
+                <a:ea typeface="SimSun" panose="02010600030101010101" pitchFamily="2" charset="-122"/>
+              </a:rPr>
+              <a:t>A</a:t>
+            </a:r>
+            <a:r>
+              <a:rPr lang="zh-CN" altLang="en-US">
+                <a:ea typeface="SimSun" panose="02010600030101010101" pitchFamily="2" charset="-122"/>
+              </a:rPr>
+              <a:t>：每一组与其他 29 组的平均曲线比较</a:t>
             </a:r>
             <a:endParaRPr lang="zh-CN" altLang="en-US">
               <a:ea typeface="SimSun" panose="02010600030101010101" pitchFamily="2" charset="-122"/>
@@ -4639,6 +4764,17 @@
 </file>
 
 <file path=customXml/item1.xml><?xml version="1.0" encoding="utf-8"?>
+<p:properties xmlns:p="http://schemas.microsoft.com/office/2006/metadata/properties" xmlns:xsi="http://www.w3.org/2001/XMLSchema-instance" xmlns:pc="http://schemas.microsoft.com/office/infopath/2007/PartnerControls">
+  <documentManagement>
+    <lcf76f155ced4ddcb4097134ff3c332f xmlns="c8a3c59a-3bb1-4ac4-8580-9b2ba74cfe5b">
+      <Terms xmlns="http://schemas.microsoft.com/office/infopath/2007/PartnerControls"/>
+    </lcf76f155ced4ddcb4097134ff3c332f>
+    <TaxCatchAll xmlns="56bf2a1e-b0f5-401e-a825-4d0cd333482d" xsi:nil="true"/>
+  </documentManagement>
+</p:properties>
+</file>
+
+<file path=customXml/item2.xml><?xml version="1.0" encoding="utf-8"?>
 <ct:contentTypeSchema xmlns:ct="http://schemas.microsoft.com/office/2006/metadata/contentType" xmlns:ma="http://schemas.microsoft.com/office/2006/metadata/properties/metaAttributes" ct:_="" ma:_="" ma:contentTypeName="ドキュメント" ma:contentTypeID="0x010100EEEA4EB4B1C87045B2C7B9E34AE6DFF4" ma:contentTypeVersion="19" ma:contentTypeDescription="新しいドキュメントを作成します。" ma:contentTypeScope="" ma:versionID="195f4af887e8b02337b1b142d1f847de">
   <xsd:schema xmlns:xsd="http://www.w3.org/2001/XMLSchema" xmlns:xs="http://www.w3.org/2001/XMLSchema" xmlns:p="http://schemas.microsoft.com/office/2006/metadata/properties" xmlns:ns2="c8a3c59a-3bb1-4ac4-8580-9b2ba74cfe5b" xmlns:ns3="56bf2a1e-b0f5-401e-a825-4d0cd333482d" targetNamespace="http://schemas.microsoft.com/office/2006/metadata/properties" ma:root="true" ma:fieldsID="81e6449237d2fc142489e0904e1e7166" ns2:_="" ns3:_="">
     <xsd:import namespace="c8a3c59a-3bb1-4ac4-8580-9b2ba74cfe5b"/>
@@ -4899,7 +5035,7 @@
 </ct:contentTypeSchema>
 </file>
 
-<file path=customXml/item2.xml><?xml version="1.0" encoding="utf-8"?>
+<file path=customXml/item3.xml><?xml version="1.0" encoding="utf-8"?>
 <?mso-contentType ?>
 <FormTemplates xmlns="http://schemas.microsoft.com/sharepoint/v3/contenttype/forms">
   <Display>DocumentLibraryForm</Display>
@@ -4908,31 +5044,20 @@
 </FormTemplates>
 </file>
 
-<file path=customXml/item3.xml><?xml version="1.0" encoding="utf-8"?>
-<p:properties xmlns:p="http://schemas.microsoft.com/office/2006/metadata/properties" xmlns:xsi="http://www.w3.org/2001/XMLSchema-instance" xmlns:pc="http://schemas.microsoft.com/office/infopath/2007/PartnerControls">
-  <documentManagement>
-    <lcf76f155ced4ddcb4097134ff3c332f xmlns="c8a3c59a-3bb1-4ac4-8580-9b2ba74cfe5b">
-      <Terms xmlns="http://schemas.microsoft.com/office/infopath/2007/PartnerControls"/>
-    </lcf76f155ced4ddcb4097134ff3c332f>
-    <TaxCatchAll xmlns="56bf2a1e-b0f5-401e-a825-4d0cd333482d" xsi:nil="true"/>
-  </documentManagement>
-</p:properties>
+<file path=customXml/itemProps1.xml><?xml version="1.0" encoding="utf-8"?>
+<ds:datastoreItem xmlns:ds="http://schemas.openxmlformats.org/officeDocument/2006/customXml" ds:itemID="{D3FA7E84-7FC5-4C41-A4F9-8872414BB2F4}">
+  <ds:schemaRefs/>
+</ds:datastoreItem>
 </file>
 
-<file path=customXml/itemProps1.xml><?xml version="1.0" encoding="utf-8"?>
+<file path=customXml/itemProps2.xml><?xml version="1.0" encoding="utf-8"?>
 <ds:datastoreItem xmlns:ds="http://schemas.openxmlformats.org/officeDocument/2006/customXml" ds:itemID="{0E5148B6-4531-42C7-8EF9-49C77F467C6E}">
   <ds:schemaRefs/>
 </ds:datastoreItem>
 </file>
 
-<file path=customXml/itemProps2.xml><?xml version="1.0" encoding="utf-8"?>
+<file path=customXml/itemProps3.xml><?xml version="1.0" encoding="utf-8"?>
 <ds:datastoreItem xmlns:ds="http://schemas.openxmlformats.org/officeDocument/2006/customXml" ds:itemID="{9FF3F963-4824-4617-9390-F81F48A450C9}">
   <ds:schemaRefs/>
 </ds:datastoreItem>
-</file>
-
-<file path=customXml/itemProps3.xml><?xml version="1.0" encoding="utf-8"?>
-<ds:datastoreItem xmlns:ds="http://schemas.openxmlformats.org/officeDocument/2006/customXml" ds:itemID="{D3FA7E84-7FC5-4C41-A4F9-8872414BB2F4}">
-  <ds:schemaRefs/>
-</ds:datastoreItem>
 </file>
--- a/Zemi/回答应对.pptx
+++ b/Zemi/回答应对.pptx
@@ -3753,7 +3753,7 @@
         <p:spPr>
           <a:xfrm>
             <a:off x="356235" y="739140"/>
-            <a:ext cx="8431530" cy="2827655"/>
+            <a:ext cx="8431530" cy="3823335"/>
           </a:xfrm>
           <a:prstGeom prst="rect">
             <a:avLst/>
@@ -3857,22 +3857,133 @@
               </a:rPr>
               <a:t>：或许在某个时间点，机械手会处于那个动作。</a:t>
             </a:r>
+            <a:endParaRPr lang="zh-CN" altLang="en-US">
+              <a:ea typeface="SimSun" panose="02010600030101010101" pitchFamily="2" charset="-122"/>
+            </a:endParaRPr>
+          </a:p>
+          <a:p>
+            <a:pPr indent="0">
+              <a:lnSpc>
+                <a:spcPct val="90000"/>
+              </a:lnSpc>
+              <a:buFont typeface="Arial" panose="020B0604020202020204" pitchFamily="34" charset="0"/>
+              <a:buNone/>
+            </a:pPr>
+            <a:endParaRPr lang="zh-CN" altLang="en-US">
+              <a:ea typeface="SimSun" panose="02010600030101010101" pitchFamily="2" charset="-122"/>
+            </a:endParaRPr>
+          </a:p>
+          <a:p>
+            <a:pPr indent="0">
+              <a:lnSpc>
+                <a:spcPct val="90000"/>
+              </a:lnSpc>
+              <a:buFont typeface="Arial" panose="020B0604020202020204" pitchFamily="34" charset="0"/>
+              <a:buNone/>
+            </a:pPr>
+            <a:r>
+              <a:rPr lang="en-US" altLang="zh-CN">
+                <a:ea typeface="SimSun" panose="02010600030101010101" pitchFamily="2" charset="-122"/>
+              </a:rPr>
+              <a:t>Q</a:t>
+            </a:r>
+            <a:r>
+              <a:rPr lang="zh-CN" altLang="en-US">
+                <a:ea typeface="SimSun" panose="02010600030101010101" pitchFamily="2" charset="-122"/>
+              </a:rPr>
+              <a:t>：为什么选择</a:t>
+            </a:r>
+            <a:r>
+              <a:rPr lang="en-US" altLang="zh-CN">
+                <a:ea typeface="SimSun" panose="02010600030101010101" pitchFamily="2" charset="-122"/>
+              </a:rPr>
+              <a:t>MLP</a:t>
+            </a:r>
+            <a:br>
+              <a:rPr lang="en-US" altLang="zh-CN">
+                <a:ea typeface="SimSun" panose="02010600030101010101" pitchFamily="2" charset="-122"/>
+              </a:rPr>
+            </a:br>
+            <a:r>
+              <a:rPr lang="en-US" altLang="zh-CN">
+                <a:ea typeface="SimSun" panose="02010600030101010101" pitchFamily="2" charset="-122"/>
+              </a:rPr>
+              <a:t>A</a:t>
+            </a:r>
+            <a:r>
+              <a:rPr lang="zh-CN" altLang="en-US">
+                <a:ea typeface="SimSun" panose="02010600030101010101" pitchFamily="2" charset="-122"/>
+              </a:rPr>
+              <a:t>：最开始我因为构建简单而选择他，然后也很轻巧，发现效果还可以就先没换模型。之后我会尝试用其他模型来对比看会有多少提升。</a:t>
+            </a:r>
+            <a:endParaRPr lang="zh-CN" altLang="en-US">
+              <a:ea typeface="SimSun" panose="02010600030101010101" pitchFamily="2" charset="-122"/>
+            </a:endParaRPr>
+          </a:p>
+          <a:p>
+            <a:pPr indent="0">
+              <a:lnSpc>
+                <a:spcPct val="90000"/>
+              </a:lnSpc>
+              <a:buFont typeface="Arial" panose="020B0604020202020204" pitchFamily="34" charset="0"/>
+              <a:buNone/>
+            </a:pPr>
+            <a:endParaRPr lang="zh-CN" altLang="en-US">
+              <a:ea typeface="SimSun" panose="02010600030101010101" pitchFamily="2" charset="-122"/>
+            </a:endParaRPr>
+          </a:p>
+          <a:p>
+            <a:pPr indent="0">
+              <a:lnSpc>
+                <a:spcPct val="90000"/>
+              </a:lnSpc>
+              <a:buFont typeface="Arial" panose="020B0604020202020204" pitchFamily="34" charset="0"/>
+              <a:buNone/>
+            </a:pPr>
+            <a:r>
+              <a:rPr lang="en-US" altLang="zh-CN">
+                <a:ea typeface="SimSun" panose="02010600030101010101" pitchFamily="2" charset="-122"/>
+                <a:sym typeface="+mn-ea"/>
+              </a:rPr>
+              <a:t>Q</a:t>
+            </a:r>
+            <a:r>
+              <a:rPr lang="zh-CN" altLang="en-US">
+                <a:ea typeface="SimSun" panose="02010600030101010101" pitchFamily="2" charset="-122"/>
+                <a:sym typeface="+mn-ea"/>
+              </a:rPr>
+              <a:t>：2个隐藏层，每层32个神经元。为什么这样设置</a:t>
+            </a:r>
             <a:br>
               <a:rPr lang="zh-CN" altLang="en-US">
                 <a:ea typeface="SimSun" panose="02010600030101010101" pitchFamily="2" charset="-122"/>
+                <a:sym typeface="+mn-ea"/>
               </a:rPr>
             </a:br>
-            <a:br>
+            <a:r>
+              <a:rPr lang="en-US" altLang="zh-CN">
+                <a:ea typeface="SimSun" panose="02010600030101010101" pitchFamily="2" charset="-122"/>
+                <a:sym typeface="+mn-ea"/>
+              </a:rPr>
+              <a:t>A</a:t>
+            </a:r>
+            <a:r>
               <a:rPr lang="zh-CN" altLang="en-US">
                 <a:ea typeface="SimSun" panose="02010600030101010101" pitchFamily="2" charset="-122"/>
+                <a:sym typeface="+mn-ea"/>
               </a:rPr>
-            </a:br>
-            <a:br>
-              <a:rPr lang="zh-CN" altLang="en-US">
+              <a:t>：我是根据大众设置，但我要说的是大部分是这样设置的，设置的理由是</a:t>
+            </a:r>
+            <a:r>
+              <a:rPr lang="en-US" altLang="zh-CN">
                 <a:ea typeface="SimSun" panose="02010600030101010101" pitchFamily="2" charset="-122"/>
+                <a:sym typeface="+mn-ea"/>
               </a:rPr>
-            </a:br>
-            <a:endParaRPr lang="en-US" altLang="zh-CN"/>
+              <a:t>...</a:t>
+            </a:r>
+            <a:endParaRPr lang="zh-CN" altLang="en-US">
+              <a:ea typeface="SimSun" panose="02010600030101010101" pitchFamily="2" charset="-122"/>
+            </a:endParaRPr>
           </a:p>
           <a:p>
             <a:pPr indent="0">
@@ -4764,17 +4875,6 @@
 </file>
 
 <file path=customXml/item1.xml><?xml version="1.0" encoding="utf-8"?>
-<p:properties xmlns:p="http://schemas.microsoft.com/office/2006/metadata/properties" xmlns:xsi="http://www.w3.org/2001/XMLSchema-instance" xmlns:pc="http://schemas.microsoft.com/office/infopath/2007/PartnerControls">
-  <documentManagement>
-    <lcf76f155ced4ddcb4097134ff3c332f xmlns="c8a3c59a-3bb1-4ac4-8580-9b2ba74cfe5b">
-      <Terms xmlns="http://schemas.microsoft.com/office/infopath/2007/PartnerControls"/>
-    </lcf76f155ced4ddcb4097134ff3c332f>
-    <TaxCatchAll xmlns="56bf2a1e-b0f5-401e-a825-4d0cd333482d" xsi:nil="true"/>
-  </documentManagement>
-</p:properties>
-</file>
-
-<file path=customXml/item2.xml><?xml version="1.0" encoding="utf-8"?>
 <ct:contentTypeSchema xmlns:ct="http://schemas.microsoft.com/office/2006/metadata/contentType" xmlns:ma="http://schemas.microsoft.com/office/2006/metadata/properties/metaAttributes" ct:_="" ma:_="" ma:contentTypeName="ドキュメント" ma:contentTypeID="0x010100EEEA4EB4B1C87045B2C7B9E34AE6DFF4" ma:contentTypeVersion="19" ma:contentTypeDescription="新しいドキュメントを作成します。" ma:contentTypeScope="" ma:versionID="195f4af887e8b02337b1b142d1f847de">
   <xsd:schema xmlns:xsd="http://www.w3.org/2001/XMLSchema" xmlns:xs="http://www.w3.org/2001/XMLSchema" xmlns:p="http://schemas.microsoft.com/office/2006/metadata/properties" xmlns:ns2="c8a3c59a-3bb1-4ac4-8580-9b2ba74cfe5b" xmlns:ns3="56bf2a1e-b0f5-401e-a825-4d0cd333482d" targetNamespace="http://schemas.microsoft.com/office/2006/metadata/properties" ma:root="true" ma:fieldsID="81e6449237d2fc142489e0904e1e7166" ns2:_="" ns3:_="">
     <xsd:import namespace="c8a3c59a-3bb1-4ac4-8580-9b2ba74cfe5b"/>
@@ -5035,7 +5135,7 @@
 </ct:contentTypeSchema>
 </file>
 
-<file path=customXml/item3.xml><?xml version="1.0" encoding="utf-8"?>
+<file path=customXml/item2.xml><?xml version="1.0" encoding="utf-8"?>
 <?mso-contentType ?>
 <FormTemplates xmlns="http://schemas.microsoft.com/sharepoint/v3/contenttype/forms">
   <Display>DocumentLibraryForm</Display>
@@ -5044,20 +5144,31 @@
 </FormTemplates>
 </file>
 
+<file path=customXml/item3.xml><?xml version="1.0" encoding="utf-8"?>
+<p:properties xmlns:p="http://schemas.microsoft.com/office/2006/metadata/properties" xmlns:xsi="http://www.w3.org/2001/XMLSchema-instance" xmlns:pc="http://schemas.microsoft.com/office/infopath/2007/PartnerControls">
+  <documentManagement>
+    <lcf76f155ced4ddcb4097134ff3c332f xmlns="c8a3c59a-3bb1-4ac4-8580-9b2ba74cfe5b">
+      <Terms xmlns="http://schemas.microsoft.com/office/infopath/2007/PartnerControls"/>
+    </lcf76f155ced4ddcb4097134ff3c332f>
+    <TaxCatchAll xmlns="56bf2a1e-b0f5-401e-a825-4d0cd333482d" xsi:nil="true"/>
+  </documentManagement>
+</p:properties>
+</file>
+
 <file path=customXml/itemProps1.xml><?xml version="1.0" encoding="utf-8"?>
-<ds:datastoreItem xmlns:ds="http://schemas.openxmlformats.org/officeDocument/2006/customXml" ds:itemID="{D3FA7E84-7FC5-4C41-A4F9-8872414BB2F4}">
+<ds:datastoreItem xmlns:ds="http://schemas.openxmlformats.org/officeDocument/2006/customXml" ds:itemID="{0E5148B6-4531-42C7-8EF9-49C77F467C6E}">
   <ds:schemaRefs/>
 </ds:datastoreItem>
 </file>
 
 <file path=customXml/itemProps2.xml><?xml version="1.0" encoding="utf-8"?>
-<ds:datastoreItem xmlns:ds="http://schemas.openxmlformats.org/officeDocument/2006/customXml" ds:itemID="{0E5148B6-4531-42C7-8EF9-49C77F467C6E}">
+<ds:datastoreItem xmlns:ds="http://schemas.openxmlformats.org/officeDocument/2006/customXml" ds:itemID="{9FF3F963-4824-4617-9390-F81F48A450C9}">
   <ds:schemaRefs/>
 </ds:datastoreItem>
 </file>
 
 <file path=customXml/itemProps3.xml><?xml version="1.0" encoding="utf-8"?>
-<ds:datastoreItem xmlns:ds="http://schemas.openxmlformats.org/officeDocument/2006/customXml" ds:itemID="{9FF3F963-4824-4617-9390-F81F48A450C9}">
+<ds:datastoreItem xmlns:ds="http://schemas.openxmlformats.org/officeDocument/2006/customXml" ds:itemID="{D3FA7E84-7FC5-4C41-A4F9-8872414BB2F4}">
   <ds:schemaRefs/>
 </ds:datastoreItem>
 </file>
--- a/Zemi/回答应对.pptx
+++ b/Zemi/回答应对.pptx
@@ -3753,7 +3753,7 @@
         <p:spPr>
           <a:xfrm>
             <a:off x="356235" y="739140"/>
-            <a:ext cx="8431530" cy="3823335"/>
+            <a:ext cx="8431530" cy="4320540"/>
           </a:xfrm>
           <a:prstGeom prst="rect">
             <a:avLst/>
@@ -3980,6 +3980,46 @@
                 <a:sym typeface="+mn-ea"/>
               </a:rPr>
               <a:t>...</a:t>
+            </a:r>
+            <a:endParaRPr lang="en-US" altLang="zh-CN">
+              <a:ea typeface="SimSun" panose="02010600030101010101" pitchFamily="2" charset="-122"/>
+              <a:sym typeface="+mn-ea"/>
+            </a:endParaRPr>
+          </a:p>
+          <a:p>
+            <a:pPr indent="0">
+              <a:lnSpc>
+                <a:spcPct val="90000"/>
+              </a:lnSpc>
+              <a:buFont typeface="Arial" panose="020B0604020202020204" pitchFamily="34" charset="0"/>
+              <a:buNone/>
+            </a:pPr>
+            <a:endParaRPr lang="en-US" altLang="zh-CN">
+              <a:ea typeface="SimSun" panose="02010600030101010101" pitchFamily="2" charset="-122"/>
+              <a:sym typeface="+mn-ea"/>
+            </a:endParaRPr>
+          </a:p>
+          <a:p>
+            <a:pPr indent="0">
+              <a:lnSpc>
+                <a:spcPct val="90000"/>
+              </a:lnSpc>
+              <a:buFont typeface="Arial" panose="020B0604020202020204" pitchFamily="34" charset="0"/>
+              <a:buNone/>
+            </a:pPr>
+            <a:r>
+              <a:rPr lang="en-US" altLang="zh-CN">
+                <a:ea typeface="SimSun" panose="02010600030101010101" pitchFamily="2" charset="-122"/>
+                <a:sym typeface="+mn-ea"/>
+              </a:rPr>
+              <a:t>Q</a:t>
+            </a:r>
+            <a:r>
+              <a:rPr lang="zh-CN" altLang="en-US">
+                <a:ea typeface="SimSun" panose="02010600030101010101" pitchFamily="2" charset="-122"/>
+                <a:sym typeface="+mn-ea"/>
+              </a:rPr>
+              <a:t>：为什么设置手指中点，不是手掌中点</a:t>
             </a:r>
             <a:endParaRPr lang="zh-CN" altLang="en-US">
               <a:ea typeface="SimSun" panose="02010600030101010101" pitchFamily="2" charset="-122"/>
@@ -4875,6 +4915,26 @@
 </file>
 
 <file path=customXml/item1.xml><?xml version="1.0" encoding="utf-8"?>
+<?mso-contentType ?>
+<FormTemplates xmlns="http://schemas.microsoft.com/sharepoint/v3/contenttype/forms">
+  <Display>DocumentLibraryForm</Display>
+  <Edit>DocumentLibraryForm</Edit>
+  <New>DocumentLibraryForm</New>
+</FormTemplates>
+</file>
+
+<file path=customXml/item2.xml><?xml version="1.0" encoding="utf-8"?>
+<p:properties xmlns:p="http://schemas.microsoft.com/office/2006/metadata/properties" xmlns:xsi="http://www.w3.org/2001/XMLSchema-instance" xmlns:pc="http://schemas.microsoft.com/office/infopath/2007/PartnerControls">
+  <documentManagement>
+    <lcf76f155ced4ddcb4097134ff3c332f xmlns="c8a3c59a-3bb1-4ac4-8580-9b2ba74cfe5b">
+      <Terms xmlns="http://schemas.microsoft.com/office/infopath/2007/PartnerControls"/>
+    </lcf76f155ced4ddcb4097134ff3c332f>
+    <TaxCatchAll xmlns="56bf2a1e-b0f5-401e-a825-4d0cd333482d" xsi:nil="true"/>
+  </documentManagement>
+</p:properties>
+</file>
+
+<file path=customXml/item3.xml><?xml version="1.0" encoding="utf-8"?>
 <ct:contentTypeSchema xmlns:ct="http://schemas.microsoft.com/office/2006/metadata/contentType" xmlns:ma="http://schemas.microsoft.com/office/2006/metadata/properties/metaAttributes" ct:_="" ma:_="" ma:contentTypeName="ドキュメント" ma:contentTypeID="0x010100EEEA4EB4B1C87045B2C7B9E34AE6DFF4" ma:contentTypeVersion="19" ma:contentTypeDescription="新しいドキュメントを作成します。" ma:contentTypeScope="" ma:versionID="195f4af887e8b02337b1b142d1f847de">
   <xsd:schema xmlns:xsd="http://www.w3.org/2001/XMLSchema" xmlns:xs="http://www.w3.org/2001/XMLSchema" xmlns:p="http://schemas.microsoft.com/office/2006/metadata/properties" xmlns:ns2="c8a3c59a-3bb1-4ac4-8580-9b2ba74cfe5b" xmlns:ns3="56bf2a1e-b0f5-401e-a825-4d0cd333482d" targetNamespace="http://schemas.microsoft.com/office/2006/metadata/properties" ma:root="true" ma:fieldsID="81e6449237d2fc142489e0904e1e7166" ns2:_="" ns3:_="">
     <xsd:import namespace="c8a3c59a-3bb1-4ac4-8580-9b2ba74cfe5b"/>
@@ -5135,40 +5195,20 @@
 </ct:contentTypeSchema>
 </file>
 
-<file path=customXml/item2.xml><?xml version="1.0" encoding="utf-8"?>
-<?mso-contentType ?>
-<FormTemplates xmlns="http://schemas.microsoft.com/sharepoint/v3/contenttype/forms">
-  <Display>DocumentLibraryForm</Display>
-  <Edit>DocumentLibraryForm</Edit>
-  <New>DocumentLibraryForm</New>
-</FormTemplates>
-</file>
-
-<file path=customXml/item3.xml><?xml version="1.0" encoding="utf-8"?>
-<p:properties xmlns:p="http://schemas.microsoft.com/office/2006/metadata/properties" xmlns:xsi="http://www.w3.org/2001/XMLSchema-instance" xmlns:pc="http://schemas.microsoft.com/office/infopath/2007/PartnerControls">
-  <documentManagement>
-    <lcf76f155ced4ddcb4097134ff3c332f xmlns="c8a3c59a-3bb1-4ac4-8580-9b2ba74cfe5b">
-      <Terms xmlns="http://schemas.microsoft.com/office/infopath/2007/PartnerControls"/>
-    </lcf76f155ced4ddcb4097134ff3c332f>
-    <TaxCatchAll xmlns="56bf2a1e-b0f5-401e-a825-4d0cd333482d" xsi:nil="true"/>
-  </documentManagement>
-</p:properties>
-</file>
-
 <file path=customXml/itemProps1.xml><?xml version="1.0" encoding="utf-8"?>
-<ds:datastoreItem xmlns:ds="http://schemas.openxmlformats.org/officeDocument/2006/customXml" ds:itemID="{0E5148B6-4531-42C7-8EF9-49C77F467C6E}">
+<ds:datastoreItem xmlns:ds="http://schemas.openxmlformats.org/officeDocument/2006/customXml" ds:itemID="{9FF3F963-4824-4617-9390-F81F48A450C9}">
   <ds:schemaRefs/>
 </ds:datastoreItem>
 </file>
 
 <file path=customXml/itemProps2.xml><?xml version="1.0" encoding="utf-8"?>
-<ds:datastoreItem xmlns:ds="http://schemas.openxmlformats.org/officeDocument/2006/customXml" ds:itemID="{9FF3F963-4824-4617-9390-F81F48A450C9}">
+<ds:datastoreItem xmlns:ds="http://schemas.openxmlformats.org/officeDocument/2006/customXml" ds:itemID="{D3FA7E84-7FC5-4C41-A4F9-8872414BB2F4}">
   <ds:schemaRefs/>
 </ds:datastoreItem>
 </file>
 
 <file path=customXml/itemProps3.xml><?xml version="1.0" encoding="utf-8"?>
-<ds:datastoreItem xmlns:ds="http://schemas.openxmlformats.org/officeDocument/2006/customXml" ds:itemID="{D3FA7E84-7FC5-4C41-A4F9-8872414BB2F4}">
+<ds:datastoreItem xmlns:ds="http://schemas.openxmlformats.org/officeDocument/2006/customXml" ds:itemID="{0E5148B6-4531-42C7-8EF9-49C77F467C6E}">
   <ds:schemaRefs/>
 </ds:datastoreItem>
 </file>
--- a/Zemi/回答应对.pptx
+++ b/Zemi/回答应对.pptx
@@ -3753,7 +3753,7 @@
         <p:spPr>
           <a:xfrm>
             <a:off x="356235" y="739140"/>
-            <a:ext cx="8431530" cy="4320540"/>
+            <a:ext cx="8431530" cy="5813425"/>
           </a:xfrm>
           <a:prstGeom prst="rect">
             <a:avLst/>
@@ -4020,6 +4020,113 @@
                 <a:sym typeface="+mn-ea"/>
               </a:rPr>
               <a:t>：为什么设置手指中点，不是手掌中点</a:t>
+            </a:r>
+            <a:endParaRPr lang="zh-CN" altLang="en-US">
+              <a:ea typeface="SimSun" panose="02010600030101010101" pitchFamily="2" charset="-122"/>
+              <a:sym typeface="+mn-ea"/>
+            </a:endParaRPr>
+          </a:p>
+          <a:p>
+            <a:pPr indent="0">
+              <a:lnSpc>
+                <a:spcPct val="90000"/>
+              </a:lnSpc>
+              <a:buFont typeface="Arial" panose="020B0604020202020204" pitchFamily="34" charset="0"/>
+              <a:buNone/>
+            </a:pPr>
+            <a:endParaRPr lang="zh-CN" altLang="en-US">
+              <a:ea typeface="SimSun" panose="02010600030101010101" pitchFamily="2" charset="-122"/>
+              <a:sym typeface="+mn-ea"/>
+            </a:endParaRPr>
+          </a:p>
+          <a:p>
+            <a:pPr indent="0">
+              <a:lnSpc>
+                <a:spcPct val="90000"/>
+              </a:lnSpc>
+              <a:buFont typeface="Arial" panose="020B0604020202020204" pitchFamily="34" charset="0"/>
+              <a:buNone/>
+            </a:pPr>
+            <a:r>
+              <a:rPr lang="en-US" altLang="zh-CN">
+                <a:ea typeface="SimSun" panose="02010600030101010101" pitchFamily="2" charset="-122"/>
+                <a:sym typeface="+mn-ea"/>
+              </a:rPr>
+              <a:t>Q</a:t>
+            </a:r>
+            <a:r>
+              <a:rPr lang="zh-CN" altLang="en-US">
+                <a:ea typeface="SimSun" panose="02010600030101010101" pitchFamily="2" charset="-122"/>
+                <a:sym typeface="+mn-ea"/>
+              </a:rPr>
+              <a:t>：在研究中，有人已经研究过你的，有什么不同吗</a:t>
+            </a:r>
+            <a:endParaRPr lang="zh-CN" altLang="en-US">
+              <a:ea typeface="SimSun" panose="02010600030101010101" pitchFamily="2" charset="-122"/>
+              <a:sym typeface="+mn-ea"/>
+            </a:endParaRPr>
+          </a:p>
+          <a:p>
+            <a:pPr indent="0">
+              <a:lnSpc>
+                <a:spcPct val="90000"/>
+              </a:lnSpc>
+              <a:buFont typeface="Arial" panose="020B0604020202020204" pitchFamily="34" charset="0"/>
+              <a:buNone/>
+            </a:pPr>
+            <a:r>
+              <a:rPr lang="en-US" altLang="zh-CN">
+                <a:ea typeface="SimSun" panose="02010600030101010101" pitchFamily="2" charset="-122"/>
+                <a:sym typeface="+mn-ea"/>
+              </a:rPr>
+              <a:t>A</a:t>
+            </a:r>
+            <a:r>
+              <a:rPr lang="zh-CN" altLang="en-US">
+                <a:ea typeface="SimSun" panose="02010600030101010101" pitchFamily="2" charset="-122"/>
+                <a:sym typeface="+mn-ea"/>
+              </a:rPr>
+              <a:t>：主要在一些细节和研究方法上不同，本研究变量首先是距离和手指开合，做了一个模型进行预测，进行了对比。</a:t>
+            </a:r>
+            <a:br>
+              <a:rPr lang="zh-CN" altLang="en-US">
+                <a:ea typeface="SimSun" panose="02010600030101010101" pitchFamily="2" charset="-122"/>
+                <a:sym typeface="+mn-ea"/>
+              </a:rPr>
+            </a:br>
+            <a:r>
+              <a:rPr lang="zh-CN" altLang="en-US">
+                <a:ea typeface="SimSun" panose="02010600030101010101" pitchFamily="2" charset="-122"/>
+                <a:sym typeface="+mn-ea"/>
+              </a:rPr>
+              <a:t>而比如</a:t>
+            </a:r>
+            <a:r>
+              <a:rPr lang="en-US" altLang="zh-CN">
+                <a:ea typeface="SimSun" panose="02010600030101010101" pitchFamily="2" charset="-122"/>
+                <a:sym typeface="+mn-ea"/>
+              </a:rPr>
+              <a:t>coast</a:t>
+            </a:r>
+            <a:r>
+              <a:rPr lang="zh-CN" altLang="en-US">
+                <a:ea typeface="SimSun" panose="02010600030101010101" pitchFamily="2" charset="-122"/>
+                <a:sym typeface="+mn-ea"/>
+              </a:rPr>
+              <a:t>的研究，他也是研究距离和开口，但他做的是不同距离间与开口的关系。</a:t>
+            </a:r>
+            <a:br>
+              <a:rPr lang="zh-CN" altLang="en-US">
+                <a:ea typeface="SimSun" panose="02010600030101010101" pitchFamily="2" charset="-122"/>
+                <a:sym typeface="+mn-ea"/>
+              </a:rPr>
+            </a:br>
+            <a:r>
+              <a:rPr lang="zh-CN" altLang="en-US">
+                <a:ea typeface="SimSun" panose="02010600030101010101" pitchFamily="2" charset="-122"/>
+                <a:sym typeface="+mn-ea"/>
+              </a:rPr>
+              <a:t>并且还集中在抓取面积上。</a:t>
             </a:r>
             <a:endParaRPr lang="zh-CN" altLang="en-US">
               <a:ea typeface="SimSun" panose="02010600030101010101" pitchFamily="2" charset="-122"/>
@@ -4915,15 +5022,6 @@
 </file>
 
 <file path=customXml/item1.xml><?xml version="1.0" encoding="utf-8"?>
-<?mso-contentType ?>
-<FormTemplates xmlns="http://schemas.microsoft.com/sharepoint/v3/contenttype/forms">
-  <Display>DocumentLibraryForm</Display>
-  <Edit>DocumentLibraryForm</Edit>
-  <New>DocumentLibraryForm</New>
-</FormTemplates>
-</file>
-
-<file path=customXml/item2.xml><?xml version="1.0" encoding="utf-8"?>
 <p:properties xmlns:p="http://schemas.microsoft.com/office/2006/metadata/properties" xmlns:xsi="http://www.w3.org/2001/XMLSchema-instance" xmlns:pc="http://schemas.microsoft.com/office/infopath/2007/PartnerControls">
   <documentManagement>
     <lcf76f155ced4ddcb4097134ff3c332f xmlns="c8a3c59a-3bb1-4ac4-8580-9b2ba74cfe5b">
@@ -4934,7 +5032,7 @@
 </p:properties>
 </file>
 
-<file path=customXml/item3.xml><?xml version="1.0" encoding="utf-8"?>
+<file path=customXml/item2.xml><?xml version="1.0" encoding="utf-8"?>
 <ct:contentTypeSchema xmlns:ct="http://schemas.microsoft.com/office/2006/metadata/contentType" xmlns:ma="http://schemas.microsoft.com/office/2006/metadata/properties/metaAttributes" ct:_="" ma:_="" ma:contentTypeName="ドキュメント" ma:contentTypeID="0x010100EEEA4EB4B1C87045B2C7B9E34AE6DFF4" ma:contentTypeVersion="19" ma:contentTypeDescription="新しいドキュメントを作成します。" ma:contentTypeScope="" ma:versionID="195f4af887e8b02337b1b142d1f847de">
   <xsd:schema xmlns:xsd="http://www.w3.org/2001/XMLSchema" xmlns:xs="http://www.w3.org/2001/XMLSchema" xmlns:p="http://schemas.microsoft.com/office/2006/metadata/properties" xmlns:ns2="c8a3c59a-3bb1-4ac4-8580-9b2ba74cfe5b" xmlns:ns3="56bf2a1e-b0f5-401e-a825-4d0cd333482d" targetNamespace="http://schemas.microsoft.com/office/2006/metadata/properties" ma:root="true" ma:fieldsID="81e6449237d2fc142489e0904e1e7166" ns2:_="" ns3:_="">
     <xsd:import namespace="c8a3c59a-3bb1-4ac4-8580-9b2ba74cfe5b"/>
@@ -5195,20 +5293,29 @@
 </ct:contentTypeSchema>
 </file>
 
+<file path=customXml/item3.xml><?xml version="1.0" encoding="utf-8"?>
+<?mso-contentType ?>
+<FormTemplates xmlns="http://schemas.microsoft.com/sharepoint/v3/contenttype/forms">
+  <Display>DocumentLibraryForm</Display>
+  <Edit>DocumentLibraryForm</Edit>
+  <New>DocumentLibraryForm</New>
+</FormTemplates>
+</file>
+
 <file path=customXml/itemProps1.xml><?xml version="1.0" encoding="utf-8"?>
-<ds:datastoreItem xmlns:ds="http://schemas.openxmlformats.org/officeDocument/2006/customXml" ds:itemID="{9FF3F963-4824-4617-9390-F81F48A450C9}">
+<ds:datastoreItem xmlns:ds="http://schemas.openxmlformats.org/officeDocument/2006/customXml" ds:itemID="{D3FA7E84-7FC5-4C41-A4F9-8872414BB2F4}">
   <ds:schemaRefs/>
 </ds:datastoreItem>
 </file>
 
 <file path=customXml/itemProps2.xml><?xml version="1.0" encoding="utf-8"?>
-<ds:datastoreItem xmlns:ds="http://schemas.openxmlformats.org/officeDocument/2006/customXml" ds:itemID="{D3FA7E84-7FC5-4C41-A4F9-8872414BB2F4}">
+<ds:datastoreItem xmlns:ds="http://schemas.openxmlformats.org/officeDocument/2006/customXml" ds:itemID="{0E5148B6-4531-42C7-8EF9-49C77F467C6E}">
   <ds:schemaRefs/>
 </ds:datastoreItem>
 </file>
 
 <file path=customXml/itemProps3.xml><?xml version="1.0" encoding="utf-8"?>
-<ds:datastoreItem xmlns:ds="http://schemas.openxmlformats.org/officeDocument/2006/customXml" ds:itemID="{0E5148B6-4531-42C7-8EF9-49C77F467C6E}">
+<ds:datastoreItem xmlns:ds="http://schemas.openxmlformats.org/officeDocument/2006/customXml" ds:itemID="{9FF3F963-4824-4617-9390-F81F48A450C9}">
   <ds:schemaRefs/>
 </ds:datastoreItem>
 </file>
--- a/Zemi/回答应对.pptx
+++ b/Zemi/回答应对.pptx
@@ -10,6 +10,7 @@
   <p:sldIdLst>
     <p:sldId id="360" r:id="rId3"/>
     <p:sldId id="359" r:id="rId5"/>
+    <p:sldId id="361" r:id="rId6"/>
   </p:sldIdLst>
   <p:sldSz cx="9144000" cy="6858000" type="screen4x3"/>
   <p:notesSz cx="6858000" cy="9144000"/>
@@ -523,6 +524,70 @@
 </file>
 
 <file path=ppt/notesSlides/notesSlide2.xml><?xml version="1.0" encoding="utf-8"?>
+<p:notes xmlns:a="http://schemas.openxmlformats.org/drawingml/2006/main" xmlns:r="http://schemas.openxmlformats.org/officeDocument/2006/relationships" xmlns:p="http://schemas.openxmlformats.org/presentationml/2006/main">
+  <p:cSld>
+    <p:spTree>
+      <p:nvGrpSpPr>
+        <p:cNvPr id="1" name=""/>
+        <p:cNvGrpSpPr/>
+        <p:nvPr/>
+      </p:nvGrpSpPr>
+      <p:grpSpPr/>
+      <p:sp>
+        <p:nvSpPr>
+          <p:cNvPr id="2" name="Slide Image Placeholder 1"/>
+          <p:cNvSpPr>
+            <a:spLocks noGrp="1"/>
+          </p:cNvSpPr>
+          <p:nvPr>
+            <p:ph type="sldImg"/>
+          </p:nvPr>
+        </p:nvSpPr>
+        <p:spPr/>
+      </p:sp>
+      <p:sp>
+        <p:nvSpPr>
+          <p:cNvPr id="3" name="Notes Placeholder 2"/>
+          <p:cNvSpPr>
+            <a:spLocks noGrp="1"/>
+          </p:cNvSpPr>
+          <p:nvPr>
+            <p:ph type="body" idx="1"/>
+          </p:nvPr>
+        </p:nvSpPr>
+        <p:spPr/>
+        <p:txBody>
+          <a:bodyPr/>
+          <a:lstStyle/>
+          <a:p/>
+        </p:txBody>
+      </p:sp>
+      <p:sp>
+        <p:nvSpPr>
+          <p:cNvPr id="4" name="Slide Number Placeholder 3"/>
+          <p:cNvSpPr>
+            <a:spLocks noGrp="1"/>
+          </p:cNvSpPr>
+          <p:nvPr>
+            <p:ph type="sldNum" idx="5"/>
+          </p:nvPr>
+        </p:nvSpPr>
+        <p:spPr/>
+        <p:txBody>
+          <a:bodyPr/>
+          <a:lstStyle/>
+          <a:p/>
+        </p:txBody>
+      </p:sp>
+    </p:spTree>
+  </p:cSld>
+  <p:clrMapOvr>
+    <a:masterClrMapping/>
+  </p:clrMapOvr>
+</p:notes>
+</file>
+
+<file path=ppt/notesSlides/notesSlide3.xml><?xml version="1.0" encoding="utf-8"?>
 <p:notes xmlns:a="http://schemas.openxmlformats.org/drawingml/2006/main" xmlns:r="http://schemas.openxmlformats.org/officeDocument/2006/relationships" xmlns:p="http://schemas.openxmlformats.org/presentationml/2006/main">
   <p:cSld>
     <p:spTree>
@@ -4180,7 +4245,7 @@
         <p:spPr>
           <a:xfrm>
             <a:off x="356235" y="739140"/>
-            <a:ext cx="8431530" cy="4818380"/>
+            <a:ext cx="8431530" cy="6062345"/>
           </a:xfrm>
           <a:prstGeom prst="rect">
             <a:avLst/>
@@ -4448,26 +4513,57 @@
             <a:r>
               <a:rPr lang="en-US" altLang="zh-CN">
                 <a:ea typeface="SimSun" panose="02010600030101010101" pitchFamily="2" charset="-122"/>
+                <a:sym typeface="+mn-ea"/>
               </a:rPr>
               <a:t>Q</a:t>
             </a:r>
             <a:r>
               <a:rPr lang="zh-CN" altLang="en-US">
                 <a:ea typeface="SimSun" panose="02010600030101010101" pitchFamily="2" charset="-122"/>
+                <a:sym typeface="+mn-ea"/>
               </a:rPr>
               <a:t>：</a:t>
             </a:r>
             <a:r>
               <a:rPr lang="en-US" altLang="zh-CN">
                 <a:ea typeface="SimSun" panose="02010600030101010101" pitchFamily="2" charset="-122"/>
+                <a:sym typeface="+mn-ea"/>
               </a:rPr>
               <a:t>Nomalized RMSE</a:t>
             </a:r>
             <a:r>
               <a:rPr lang="zh-CN" altLang="en-US">
                 <a:ea typeface="SimSun" panose="02010600030101010101" pitchFamily="2" charset="-122"/>
-              </a:rPr>
-              <a:t>是怎么算的</a:t>
+                <a:sym typeface="+mn-ea"/>
+              </a:rPr>
+              <a:t>是什么</a:t>
+            </a:r>
+            <a:br>
+              <a:rPr lang="zh-CN" altLang="en-US">
+                <a:ea typeface="SimSun" panose="02010600030101010101" pitchFamily="2" charset="-122"/>
+                <a:sym typeface="+mn-ea"/>
+              </a:rPr>
+            </a:br>
+            <a:r>
+              <a:rPr lang="en-US" altLang="zh-CN">
+                <a:ea typeface="SimSun" panose="02010600030101010101" pitchFamily="2" charset="-122"/>
+                <a:sym typeface="+mn-ea"/>
+              </a:rPr>
+              <a:t>A</a:t>
+            </a:r>
+            <a:r>
+              <a:rPr lang="zh-CN" altLang="en-US">
+                <a:ea typeface="SimSun" panose="02010600030101010101" pitchFamily="2" charset="-122"/>
+                <a:sym typeface="+mn-ea"/>
+              </a:rPr>
+              <a:t>：</a:t>
+            </a:r>
+            <a:r>
+              <a:rPr lang="en-US" altLang="zh-CN">
+                <a:ea typeface="SimSun" panose="02010600030101010101" pitchFamily="2" charset="-122"/>
+                <a:sym typeface="+mn-ea"/>
+              </a:rPr>
+              <a:t>root mean square error</a:t>
             </a:r>
             <a:endParaRPr lang="zh-CN" altLang="en-US">
               <a:ea typeface="SimSun" panose="02010600030101010101" pitchFamily="2" charset="-122"/>
@@ -4481,20 +4577,234 @@
               <a:buFont typeface="Arial" panose="020B0604020202020204" pitchFamily="34" charset="0"/>
               <a:buNone/>
             </a:pPr>
-            <a:r>
-              <a:rPr lang="en-US" altLang="zh-CN">
-                <a:ea typeface="SimSun" panose="02010600030101010101" pitchFamily="2" charset="-122"/>
-              </a:rPr>
-              <a:t>A</a:t>
-            </a:r>
-            <a:r>
-              <a:rPr lang="zh-CN" altLang="en-US">
-                <a:ea typeface="SimSun" panose="02010600030101010101" pitchFamily="2" charset="-122"/>
-              </a:rPr>
-              <a:t>：每一组与其他 29 组的平均曲线比较</a:t>
-            </a:r>
             <a:endParaRPr lang="zh-CN" altLang="en-US">
               <a:ea typeface="SimSun" panose="02010600030101010101" pitchFamily="2" charset="-122"/>
+            </a:endParaRPr>
+          </a:p>
+          <a:p>
+            <a:pPr indent="0">
+              <a:lnSpc>
+                <a:spcPct val="90000"/>
+              </a:lnSpc>
+              <a:buFont typeface="Arial" panose="020B0604020202020204" pitchFamily="34" charset="0"/>
+              <a:buNone/>
+            </a:pPr>
+            <a:r>
+              <a:rPr lang="en-US" altLang="zh-CN">
+                <a:ea typeface="SimSun" panose="02010600030101010101" pitchFamily="2" charset="-122"/>
+              </a:rPr>
+              <a:t>Q</a:t>
+            </a:r>
+            <a:r>
+              <a:rPr lang="zh-CN" altLang="en-US">
+                <a:ea typeface="SimSun" panose="02010600030101010101" pitchFamily="2" charset="-122"/>
+              </a:rPr>
+              <a:t>：</a:t>
+            </a:r>
+            <a:r>
+              <a:rPr lang="en-US" altLang="zh-CN">
+                <a:ea typeface="SimSun" panose="02010600030101010101" pitchFamily="2" charset="-122"/>
+              </a:rPr>
+              <a:t>Nomalized RMSE</a:t>
+            </a:r>
+            <a:r>
+              <a:rPr lang="zh-CN" altLang="en-US">
+                <a:ea typeface="SimSun" panose="02010600030101010101" pitchFamily="2" charset="-122"/>
+              </a:rPr>
+              <a:t>是怎么算的</a:t>
+            </a:r>
+            <a:endParaRPr lang="zh-CN" altLang="en-US">
+              <a:ea typeface="SimSun" panose="02010600030101010101" pitchFamily="2" charset="-122"/>
+            </a:endParaRPr>
+          </a:p>
+          <a:p>
+            <a:pPr indent="0">
+              <a:lnSpc>
+                <a:spcPct val="90000"/>
+              </a:lnSpc>
+              <a:buFont typeface="Arial" panose="020B0604020202020204" pitchFamily="34" charset="0"/>
+              <a:buNone/>
+            </a:pPr>
+            <a:r>
+              <a:rPr lang="en-US" altLang="zh-CN">
+                <a:ea typeface="SimSun" panose="02010600030101010101" pitchFamily="2" charset="-122"/>
+              </a:rPr>
+              <a:t>A</a:t>
+            </a:r>
+            <a:r>
+              <a:rPr lang="zh-CN" altLang="en-US">
+                <a:ea typeface="SimSun" panose="02010600030101010101" pitchFamily="2" charset="-122"/>
+              </a:rPr>
+              <a:t>：每一组与其他 29 组的平均曲线比较</a:t>
+            </a:r>
+            <a:endParaRPr lang="zh-CN" altLang="en-US">
+              <a:ea typeface="SimSun" panose="02010600030101010101" pitchFamily="2" charset="-122"/>
+            </a:endParaRPr>
+          </a:p>
+          <a:p>
+            <a:pPr indent="0">
+              <a:lnSpc>
+                <a:spcPct val="90000"/>
+              </a:lnSpc>
+              <a:buFont typeface="Arial" panose="020B0604020202020204" pitchFamily="34" charset="0"/>
+              <a:buNone/>
+            </a:pPr>
+            <a:endParaRPr lang="zh-CN" altLang="en-US">
+              <a:ea typeface="SimSun" panose="02010600030101010101" pitchFamily="2" charset="-122"/>
+            </a:endParaRPr>
+          </a:p>
+          <a:p>
+            <a:pPr indent="0">
+              <a:lnSpc>
+                <a:spcPct val="90000"/>
+              </a:lnSpc>
+              <a:buFont typeface="Arial" panose="020B0604020202020204" pitchFamily="34" charset="0"/>
+              <a:buNone/>
+            </a:pPr>
+            <a:r>
+              <a:rPr lang="en-US" altLang="zh-CN">
+                <a:ea typeface="SimSun" panose="02010600030101010101" pitchFamily="2" charset="-122"/>
+                <a:sym typeface="+mn-ea"/>
+              </a:rPr>
+              <a:t>Q</a:t>
+            </a:r>
+            <a:r>
+              <a:rPr lang="zh-CN" altLang="en-US">
+                <a:ea typeface="SimSun" panose="02010600030101010101" pitchFamily="2" charset="-122"/>
+                <a:sym typeface="+mn-ea"/>
+              </a:rPr>
+              <a:t>：关于剪辑点的问题</a:t>
+            </a:r>
+            <a:endParaRPr lang="en-US">
+              <a:ea typeface="SimSun" panose="02010600030101010101" pitchFamily="2" charset="-122"/>
+            </a:endParaRPr>
+          </a:p>
+        </p:txBody>
+      </p:sp>
+    </p:spTree>
+  </p:cSld>
+  <p:clrMapOvr>
+    <a:masterClrMapping/>
+  </p:clrMapOvr>
+  <p:timing>
+    <p:tnLst>
+      <p:par>
+        <p:cTn id="1" dur="indefinite" restart="never" nodeType="tmRoot"/>
+      </p:par>
+    </p:tnLst>
+  </p:timing>
+</p:sld>
+</file>
+
+<file path=ppt/slides/slide3.xml><?xml version="1.0" encoding="utf-8"?>
+<p:sld xmlns:a="http://schemas.openxmlformats.org/drawingml/2006/main" xmlns:r="http://schemas.openxmlformats.org/officeDocument/2006/relationships" xmlns:p="http://schemas.openxmlformats.org/presentationml/2006/main">
+  <p:cSld>
+    <p:spTree>
+      <p:nvGrpSpPr>
+        <p:cNvPr id="1" name=""/>
+        <p:cNvGrpSpPr/>
+        <p:nvPr/>
+      </p:nvGrpSpPr>
+      <p:grpSpPr/>
+      <p:sp>
+        <p:nvSpPr>
+          <p:cNvPr id="2" name="文本框 1"/>
+          <p:cNvSpPr txBox="1"/>
+          <p:nvPr/>
+        </p:nvSpPr>
+        <p:spPr>
+          <a:xfrm>
+            <a:off x="356235" y="739140"/>
+            <a:ext cx="8431530" cy="339725"/>
+          </a:xfrm>
+          <a:prstGeom prst="rect">
+            <a:avLst/>
+          </a:prstGeom>
+        </p:spPr>
+        <p:txBody>
+          <a:bodyPr wrap="square">
+            <a:spAutoFit/>
+          </a:bodyPr>
+          <a:p>
+            <a:pPr indent="0">
+              <a:lnSpc>
+                <a:spcPct val="90000"/>
+              </a:lnSpc>
+              <a:buFont typeface="Arial" panose="020B0604020202020204" pitchFamily="34" charset="0"/>
+              <a:buNone/>
+            </a:pPr>
+            <a:r>
+              <a:rPr lang="en-US" altLang="zh-CN">
+                <a:ea typeface="SimSun" panose="02010600030101010101" pitchFamily="2" charset="-122"/>
+                <a:sym typeface="+mn-ea"/>
+              </a:rPr>
+              <a:t>Q</a:t>
+            </a:r>
+            <a:r>
+              <a:rPr lang="zh-CN" altLang="en-US">
+                <a:ea typeface="SimSun" panose="02010600030101010101" pitchFamily="2" charset="-122"/>
+                <a:sym typeface="+mn-ea"/>
+              </a:rPr>
+              <a:t>：首位不足</a:t>
+            </a:r>
+            <a:r>
+              <a:rPr lang="en-US" altLang="zh-CN">
+                <a:ea typeface="SimSun" panose="02010600030101010101" pitchFamily="2" charset="-122"/>
+                <a:sym typeface="+mn-ea"/>
+              </a:rPr>
+              <a:t>10frame</a:t>
+            </a:r>
+            <a:endParaRPr lang="en-US" altLang="zh-CN">
+              <a:ea typeface="SimSun" panose="02010600030101010101" pitchFamily="2" charset="-122"/>
+              <a:sym typeface="+mn-ea"/>
+            </a:endParaRPr>
+          </a:p>
+        </p:txBody>
+      </p:sp>
+      <p:sp>
+        <p:nvSpPr>
+          <p:cNvPr id="3" name="文本框 2"/>
+          <p:cNvSpPr txBox="1"/>
+          <p:nvPr/>
+        </p:nvSpPr>
+        <p:spPr>
+          <a:xfrm>
+            <a:off x="356235" y="1690370"/>
+            <a:ext cx="8431530" cy="339725"/>
+          </a:xfrm>
+          <a:prstGeom prst="rect">
+            <a:avLst/>
+          </a:prstGeom>
+        </p:spPr>
+        <p:txBody>
+          <a:bodyPr wrap="square">
+            <a:spAutoFit/>
+          </a:bodyPr>
+          <a:p>
+            <a:pPr indent="0">
+              <a:lnSpc>
+                <a:spcPct val="90000"/>
+              </a:lnSpc>
+              <a:buFont typeface="Arial" panose="020B0604020202020204" pitchFamily="34" charset="0"/>
+              <a:buNone/>
+            </a:pPr>
+            <a:r>
+              <a:rPr lang="en-US" altLang="zh-CN">
+                <a:ea typeface="SimSun" panose="02010600030101010101" pitchFamily="2" charset="-122"/>
+                <a:sym typeface="+mn-ea"/>
+              </a:rPr>
+              <a:t>Q</a:t>
+            </a:r>
+            <a:r>
+              <a:rPr lang="zh-CN" altLang="en-US">
+                <a:ea typeface="SimSun" panose="02010600030101010101" pitchFamily="2" charset="-122"/>
+                <a:sym typeface="+mn-ea"/>
+              </a:rPr>
+              <a:t>：为什么下降这么快</a:t>
+            </a:r>
+            <a:endParaRPr lang="en-US" altLang="zh-CN">
+              <a:ea typeface="SimSun" panose="02010600030101010101" pitchFamily="2" charset="-122"/>
+              <a:sym typeface="+mn-ea"/>
             </a:endParaRPr>
           </a:p>
         </p:txBody>
@@ -5022,17 +5332,6 @@
 </file>
 
 <file path=customXml/item1.xml><?xml version="1.0" encoding="utf-8"?>
-<p:properties xmlns:p="http://schemas.microsoft.com/office/2006/metadata/properties" xmlns:xsi="http://www.w3.org/2001/XMLSchema-instance" xmlns:pc="http://schemas.microsoft.com/office/infopath/2007/PartnerControls">
-  <documentManagement>
-    <lcf76f155ced4ddcb4097134ff3c332f xmlns="c8a3c59a-3bb1-4ac4-8580-9b2ba74cfe5b">
-      <Terms xmlns="http://schemas.microsoft.com/office/infopath/2007/PartnerControls"/>
-    </lcf76f155ced4ddcb4097134ff3c332f>
-    <TaxCatchAll xmlns="56bf2a1e-b0f5-401e-a825-4d0cd333482d" xsi:nil="true"/>
-  </documentManagement>
-</p:properties>
-</file>
-
-<file path=customXml/item2.xml><?xml version="1.0" encoding="utf-8"?>
 <ct:contentTypeSchema xmlns:ct="http://schemas.microsoft.com/office/2006/metadata/contentType" xmlns:ma="http://schemas.microsoft.com/office/2006/metadata/properties/metaAttributes" ct:_="" ma:_="" ma:contentTypeName="ドキュメント" ma:contentTypeID="0x010100EEEA4EB4B1C87045B2C7B9E34AE6DFF4" ma:contentTypeVersion="19" ma:contentTypeDescription="新しいドキュメントを作成します。" ma:contentTypeScope="" ma:versionID="195f4af887e8b02337b1b142d1f847de">
   <xsd:schema xmlns:xsd="http://www.w3.org/2001/XMLSchema" xmlns:xs="http://www.w3.org/2001/XMLSchema" xmlns:p="http://schemas.microsoft.com/office/2006/metadata/properties" xmlns:ns2="c8a3c59a-3bb1-4ac4-8580-9b2ba74cfe5b" xmlns:ns3="56bf2a1e-b0f5-401e-a825-4d0cd333482d" targetNamespace="http://schemas.microsoft.com/office/2006/metadata/properties" ma:root="true" ma:fieldsID="81e6449237d2fc142489e0904e1e7166" ns2:_="" ns3:_="">
     <xsd:import namespace="c8a3c59a-3bb1-4ac4-8580-9b2ba74cfe5b"/>
@@ -5293,7 +5592,7 @@
 </ct:contentTypeSchema>
 </file>
 
-<file path=customXml/item3.xml><?xml version="1.0" encoding="utf-8"?>
+<file path=customXml/item2.xml><?xml version="1.0" encoding="utf-8"?>
 <?mso-contentType ?>
 <FormTemplates xmlns="http://schemas.microsoft.com/sharepoint/v3/contenttype/forms">
   <Display>DocumentLibraryForm</Display>
@@ -5302,20 +5601,31 @@
 </FormTemplates>
 </file>
 
+<file path=customXml/item3.xml><?xml version="1.0" encoding="utf-8"?>
+<p:properties xmlns:p="http://schemas.microsoft.com/office/2006/metadata/properties" xmlns:xsi="http://www.w3.org/2001/XMLSchema-instance" xmlns:pc="http://schemas.microsoft.com/office/infopath/2007/PartnerControls">
+  <documentManagement>
+    <lcf76f155ced4ddcb4097134ff3c332f xmlns="c8a3c59a-3bb1-4ac4-8580-9b2ba74cfe5b">
+      <Terms xmlns="http://schemas.microsoft.com/office/infopath/2007/PartnerControls"/>
+    </lcf76f155ced4ddcb4097134ff3c332f>
+    <TaxCatchAll xmlns="56bf2a1e-b0f5-401e-a825-4d0cd333482d" xsi:nil="true"/>
+  </documentManagement>
+</p:properties>
+</file>
+
 <file path=customXml/itemProps1.xml><?xml version="1.0" encoding="utf-8"?>
-<ds:datastoreItem xmlns:ds="http://schemas.openxmlformats.org/officeDocument/2006/customXml" ds:itemID="{D3FA7E84-7FC5-4C41-A4F9-8872414BB2F4}">
+<ds:datastoreItem xmlns:ds="http://schemas.openxmlformats.org/officeDocument/2006/customXml" ds:itemID="{0E5148B6-4531-42C7-8EF9-49C77F467C6E}">
   <ds:schemaRefs/>
 </ds:datastoreItem>
 </file>
 
 <file path=customXml/itemProps2.xml><?xml version="1.0" encoding="utf-8"?>
-<ds:datastoreItem xmlns:ds="http://schemas.openxmlformats.org/officeDocument/2006/customXml" ds:itemID="{0E5148B6-4531-42C7-8EF9-49C77F467C6E}">
+<ds:datastoreItem xmlns:ds="http://schemas.openxmlformats.org/officeDocument/2006/customXml" ds:itemID="{9FF3F963-4824-4617-9390-F81F48A450C9}">
   <ds:schemaRefs/>
 </ds:datastoreItem>
 </file>
 
 <file path=customXml/itemProps3.xml><?xml version="1.0" encoding="utf-8"?>
-<ds:datastoreItem xmlns:ds="http://schemas.openxmlformats.org/officeDocument/2006/customXml" ds:itemID="{9FF3F963-4824-4617-9390-F81F48A450C9}">
+<ds:datastoreItem xmlns:ds="http://schemas.openxmlformats.org/officeDocument/2006/customXml" ds:itemID="{D3FA7E84-7FC5-4C41-A4F9-8872414BB2F4}">
   <ds:schemaRefs/>
 </ds:datastoreItem>
 </file>